--- a/Slides/L9_Loops-and-Iteration.pptx
+++ b/Slides/L9_Loops-and-Iteration.pptx
@@ -808,7 +808,12 @@
             <p:ph type="sldImg"/>
           </p:nvPr>
         </p:nvSpPr>
-        <p:spPr/>
+        <p:spPr>
+          <a:xfrm>
+            <a:off x="0" y="763588"/>
+            <a:ext cx="0" cy="0"/>
+          </a:xfrm>
+        </p:spPr>
       </p:sp>
       <p:sp>
         <p:nvSpPr>
@@ -44084,6 +44089,13 @@
   <p:clrMapOvr>
     <a:masterClrMapping/>
   </p:clrMapOvr>
+  <p:timing>
+    <p:tnLst>
+      <p:par>
+        <p:cTn id="1" dur="indefinite" restart="never" nodeType="tmRoot"/>
+      </p:par>
+    </p:tnLst>
+  </p:timing>
 </p:sld>
 </file>
 
@@ -44230,8 +44242,8 @@
         </p:nvSpPr>
         <p:spPr>
           <a:xfrm>
-            <a:off x="580041" y="1949942"/>
-            <a:ext cx="8135334" cy="5593858"/>
+            <a:off x="580040" y="1949942"/>
+            <a:ext cx="9311211" cy="2492990"/>
           </a:xfrm>
           <a:prstGeom prst="rect">
             <a:avLst/>
@@ -44253,10 +44265,34 @@
               </a:tabLst>
             </a:pPr>
             <a:r>
-              <a:rPr sz="2600" b="0">
+              <a:rPr sz="2600" b="0" dirty="0">
                 <a:latin typeface="Cambria"/>
               </a:rPr>
-              <a:t>while ( !sensor_ready ( ) ) {</a:t>
+              <a:t>while ( </a:t>
+            </a:r>
+            <a:r>
+              <a:rPr sz="2600" b="0" dirty="0" smtClean="0">
+                <a:latin typeface="Cambria"/>
+              </a:rPr>
+              <a:t>!</a:t>
+            </a:r>
+            <a:r>
+              <a:rPr sz="2600" b="0" dirty="0" err="1" smtClean="0">
+                <a:latin typeface="Cambria"/>
+              </a:rPr>
+              <a:t>sensor_ready</a:t>
+            </a:r>
+            <a:r>
+              <a:rPr sz="2600" b="0" dirty="0" smtClean="0">
+                <a:latin typeface="Cambria"/>
+              </a:rPr>
+              <a:t> ( </a:t>
+            </a:r>
+            <a:r>
+              <a:rPr sz="2600" b="0" dirty="0">
+                <a:latin typeface="Cambria"/>
+              </a:rPr>
+              <a:t>) ) {</a:t>
             </a:r>
           </a:p>
           <a:p>
@@ -44269,7 +44305,7 @@
               </a:tabLst>
             </a:pPr>
             <a:r>
-              <a:rPr sz="2600" b="0">
+              <a:rPr sz="2600" b="0" dirty="0">
                 <a:latin typeface="Cambria"/>
               </a:rPr>
               <a:t>	// do nothing - just ask again</a:t>
@@ -44285,7 +44321,7 @@
               </a:tabLst>
             </a:pPr>
             <a:r>
-              <a:rPr sz="2600" b="0">
+              <a:rPr sz="2600" b="0" dirty="0">
                 <a:latin typeface="Cambria"/>
               </a:rPr>
               <a:t>}</a:t>
@@ -44301,10 +44337,22 @@
               </a:tabLst>
             </a:pPr>
             <a:r>
-              <a:rPr sz="2600" b="0">
+              <a:rPr sz="2600" b="0" dirty="0">
                 <a:latin typeface="Cambria"/>
               </a:rPr>
-              <a:t>counts = read_adc ( ) ;</a:t>
+              <a:t>counts = </a:t>
+            </a:r>
+            <a:r>
+              <a:rPr sz="2600" b="0" dirty="0" err="1">
+                <a:latin typeface="Cambria"/>
+              </a:rPr>
+              <a:t>read_adc</a:t>
+            </a:r>
+            <a:r>
+              <a:rPr sz="2600" b="0" dirty="0">
+                <a:latin typeface="Cambria"/>
+              </a:rPr>
+              <a:t> ( ) ;</a:t>
             </a:r>
           </a:p>
           <a:p>
@@ -44317,7 +44365,7 @@
               </a:tabLst>
             </a:pPr>
             <a:r>
-              <a:rPr sz="2600">
+              <a:rPr sz="2600" dirty="0">
                 <a:latin typeface="Cambria"/>
               </a:rPr>
               <a:t> </a:t>
@@ -44333,38 +44381,46 @@
               </a:tabLst>
             </a:pPr>
             <a:r>
-              <a:rPr sz="2600" b="0">
+              <a:rPr sz="2600" b="0" dirty="0">
                 <a:latin typeface="Cambria"/>
               </a:rPr>
               <a:t>This is </a:t>
             </a:r>
             <a:r>
-              <a:rPr sz="2600" b="1">
+              <a:rPr sz="2600" b="1" dirty="0">
                 <a:latin typeface="Cambria"/>
               </a:rPr>
               <a:t>polling</a:t>
             </a:r>
             <a:r>
-              <a:rPr sz="2600" b="0">
+              <a:rPr sz="2600" b="0" dirty="0">
                 <a:latin typeface="Cambria"/>
               </a:rPr>
-              <a:t>:  asking again and again</a:t>
-            </a:r>
-          </a:p>
-          <a:p>
-            <a:pPr>
-              <a:tabLst>
-                <a:tab pos="548640" algn="l"/>
-                <a:tab pos="1097280" algn="l"/>
-                <a:tab pos="1645920" algn="l"/>
-                <a:tab pos="2194560" algn="l"/>
-              </a:tabLst>
-            </a:pPr>
-            <a:r>
-              <a:rPr sz="2600" b="0">
+              <a:t>:  asking again and </a:t>
+            </a:r>
+            <a:r>
+              <a:rPr sz="2600" b="0" dirty="0" smtClean="0">
                 <a:latin typeface="Cambria"/>
               </a:rPr>
-              <a:t>until the answer changes</a:t>
+              <a:t>again</a:t>
+            </a:r>
+            <a:r>
+              <a:rPr lang="en-US" sz="2600" b="0" dirty="0" smtClean="0">
+                <a:latin typeface="Cambria"/>
+              </a:rPr>
+              <a:t> </a:t>
+            </a:r>
+            <a:r>
+              <a:rPr sz="2600" b="0" dirty="0" smtClean="0">
+                <a:latin typeface="Cambria"/>
+              </a:rPr>
+              <a:t>until </a:t>
+            </a:r>
+            <a:r>
+              <a:rPr sz="2600" b="0" dirty="0">
+                <a:latin typeface="Cambria"/>
+              </a:rPr>
+              <a:t>the answer changes</a:t>
             </a:r>
           </a:p>
         </p:txBody>
@@ -44374,6 +44430,13 @@
   <p:clrMapOvr>
     <a:masterClrMapping/>
   </p:clrMapOvr>
+  <p:timing>
+    <p:tnLst>
+      <p:par>
+        <p:cTn id="1" dur="indefinite" restart="never" nodeType="tmRoot"/>
+      </p:par>
+    </p:tnLst>
+  </p:timing>
 </p:sld>
 </file>
 
@@ -44650,6 +44713,13 @@
   <p:clrMapOvr>
     <a:masterClrMapping/>
   </p:clrMapOvr>
+  <p:timing>
+    <p:tnLst>
+      <p:par>
+        <p:cTn id="1" dur="indefinite" restart="never" nodeType="tmRoot"/>
+      </p:par>
+    </p:tnLst>
+  </p:timing>
 </p:sld>
 </file>
 
@@ -49889,6 +49959,13 @@
   <p:clrMapOvr>
     <a:masterClrMapping/>
   </p:clrMapOvr>
+  <p:timing>
+    <p:tnLst>
+      <p:par>
+        <p:cTn id="1" dur="indefinite" restart="never" nodeType="tmRoot"/>
+      </p:par>
+    </p:tnLst>
+  </p:timing>
 </p:sld>
 </file>
 
@@ -51353,6 +51430,13 @@
   <p:clrMapOvr>
     <a:masterClrMapping/>
   </p:clrMapOvr>
+  <p:timing>
+    <p:tnLst>
+      <p:par>
+        <p:cTn id="1" dur="indefinite" restart="never" nodeType="tmRoot"/>
+      </p:par>
+    </p:tnLst>
+  </p:timing>
 </p:sld>
 </file>
 
@@ -51965,6 +52049,13 @@
   <p:clrMapOvr>
     <a:masterClrMapping/>
   </p:clrMapOvr>
+  <p:timing>
+    <p:tnLst>
+      <p:par>
+        <p:cTn id="1" dur="indefinite" restart="never" nodeType="tmRoot"/>
+      </p:par>
+    </p:tnLst>
+  </p:timing>
 </p:sld>
 </file>
 
@@ -52283,6 +52374,13 @@
   <p:clrMapOvr>
     <a:masterClrMapping/>
   </p:clrMapOvr>
+  <p:timing>
+    <p:tnLst>
+      <p:par>
+        <p:cTn id="1" dur="indefinite" restart="never" nodeType="tmRoot"/>
+      </p:par>
+    </p:tnLst>
+  </p:timing>
 </p:sld>
 </file>
 
@@ -52575,6 +52673,13 @@
   <p:clrMapOvr>
     <a:masterClrMapping/>
   </p:clrMapOvr>
+  <p:timing>
+    <p:tnLst>
+      <p:par>
+        <p:cTn id="1" dur="indefinite" restart="never" nodeType="tmRoot"/>
+      </p:par>
+    </p:tnLst>
+  </p:timing>
 </p:sld>
 </file>
 
@@ -52897,6 +53002,13 @@
   <p:clrMapOvr>
     <a:masterClrMapping/>
   </p:clrMapOvr>
+  <p:timing>
+    <p:tnLst>
+      <p:par>
+        <p:cTn id="1" dur="indefinite" restart="never" nodeType="tmRoot"/>
+      </p:par>
+    </p:tnLst>
+  </p:timing>
 </p:sld>
 </file>
 
@@ -53191,6 +53303,13 @@
   <p:clrMapOvr>
     <a:masterClrMapping/>
   </p:clrMapOvr>
+  <p:timing>
+    <p:tnLst>
+      <p:par>
+        <p:cTn id="1" dur="indefinite" restart="never" nodeType="tmRoot"/>
+      </p:par>
+    </p:tnLst>
+  </p:timing>
 </p:sld>
 </file>
 
@@ -53497,6 +53616,13 @@
   <p:clrMapOvr>
     <a:masterClrMapping/>
   </p:clrMapOvr>
+  <p:timing>
+    <p:tnLst>
+      <p:par>
+        <p:cTn id="1" dur="indefinite" restart="never" nodeType="tmRoot"/>
+      </p:par>
+    </p:tnLst>
+  </p:timing>
 </p:sld>
 </file>
 
@@ -53797,6 +53923,13 @@
   <p:clrMapOvr>
     <a:masterClrMapping/>
   </p:clrMapOvr>
+  <p:timing>
+    <p:tnLst>
+      <p:par>
+        <p:cTn id="1" dur="indefinite" restart="never" nodeType="tmRoot"/>
+      </p:par>
+    </p:tnLst>
+  </p:timing>
 </p:sld>
 </file>
 
@@ -54087,6 +54220,13 @@
   <p:clrMapOvr>
     <a:masterClrMapping/>
   </p:clrMapOvr>
+  <p:timing>
+    <p:tnLst>
+      <p:par>
+        <p:cTn id="1" dur="indefinite" restart="never" nodeType="tmRoot"/>
+      </p:par>
+    </p:tnLst>
+  </p:timing>
 </p:sld>
 </file>
 
@@ -54381,6 +54521,13 @@
   <p:clrMapOvr>
     <a:masterClrMapping/>
   </p:clrMapOvr>
+  <p:timing>
+    <p:tnLst>
+      <p:par>
+        <p:cTn id="1" dur="indefinite" restart="never" nodeType="tmRoot"/>
+      </p:par>
+    </p:tnLst>
+  </p:timing>
 </p:sld>
 </file>
 
@@ -54689,6 +54836,13 @@
   <p:clrMapOvr>
     <a:masterClrMapping/>
   </p:clrMapOvr>
+  <p:timing>
+    <p:tnLst>
+      <p:par>
+        <p:cTn id="1" dur="indefinite" restart="never" nodeType="tmRoot"/>
+      </p:par>
+    </p:tnLst>
+  </p:timing>
 </p:sld>
 </file>
 
@@ -55877,6 +56031,13 @@
   <p:clrMapOvr>
     <a:masterClrMapping/>
   </p:clrMapOvr>
+  <p:timing>
+    <p:tnLst>
+      <p:par>
+        <p:cTn id="1" dur="indefinite" restart="never" nodeType="tmRoot"/>
+      </p:par>
+    </p:tnLst>
+  </p:timing>
 </p:sld>
 </file>
 
@@ -56155,6 +56316,13 @@
   <p:clrMapOvr>
     <a:masterClrMapping/>
   </p:clrMapOvr>
+  <p:timing>
+    <p:tnLst>
+      <p:par>
+        <p:cTn id="1" dur="indefinite" restart="never" nodeType="tmRoot"/>
+      </p:par>
+    </p:tnLst>
+  </p:timing>
 </p:sld>
 </file>
 
@@ -56481,6 +56649,13 @@
   <p:clrMapOvr>
     <a:masterClrMapping/>
   </p:clrMapOvr>
+  <p:timing>
+    <p:tnLst>
+      <p:par>
+        <p:cTn id="1" dur="indefinite" restart="never" nodeType="tmRoot"/>
+      </p:par>
+    </p:tnLst>
+  </p:timing>
 </p:sld>
 </file>
 
@@ -56819,6 +56994,13 @@
   <p:clrMapOvr>
     <a:masterClrMapping/>
   </p:clrMapOvr>
+  <p:timing>
+    <p:tnLst>
+      <p:par>
+        <p:cTn id="1" dur="indefinite" restart="never" nodeType="tmRoot"/>
+      </p:par>
+    </p:tnLst>
+  </p:timing>
 </p:sld>
 </file>
 
@@ -57113,6 +57295,13 @@
   <p:clrMapOvr>
     <a:masterClrMapping/>
   </p:clrMapOvr>
+  <p:timing>
+    <p:tnLst>
+      <p:par>
+        <p:cTn id="1" dur="indefinite" restart="never" nodeType="tmRoot"/>
+      </p:par>
+    </p:tnLst>
+  </p:timing>
 </p:sld>
 </file>
 
@@ -57407,6 +57596,13 @@
   <p:clrMapOvr>
     <a:masterClrMapping/>
   </p:clrMapOvr>
+  <p:timing>
+    <p:tnLst>
+      <p:par>
+        <p:cTn id="1" dur="indefinite" restart="never" nodeType="tmRoot"/>
+      </p:par>
+    </p:tnLst>
+  </p:timing>
 </p:sld>
 </file>
 
@@ -57685,6 +57881,13 @@
   <p:clrMapOvr>
     <a:masterClrMapping/>
   </p:clrMapOvr>
+  <p:timing>
+    <p:tnLst>
+      <p:par>
+        <p:cTn id="1" dur="indefinite" restart="never" nodeType="tmRoot"/>
+      </p:par>
+    </p:tnLst>
+  </p:timing>
 </p:sld>
 </file>
 
@@ -57963,6 +58166,13 @@
   <p:clrMapOvr>
     <a:masterClrMapping/>
   </p:clrMapOvr>
+  <p:timing>
+    <p:tnLst>
+      <p:par>
+        <p:cTn id="1" dur="indefinite" restart="never" nodeType="tmRoot"/>
+      </p:par>
+    </p:tnLst>
+  </p:timing>
 </p:sld>
 </file>
 
@@ -58257,6 +58467,13 @@
   <p:clrMapOvr>
     <a:masterClrMapping/>
   </p:clrMapOvr>
+  <p:timing>
+    <p:tnLst>
+      <p:par>
+        <p:cTn id="1" dur="indefinite" restart="never" nodeType="tmRoot"/>
+      </p:par>
+    </p:tnLst>
+  </p:timing>
 </p:sld>
 </file>
 
@@ -58551,6 +58768,13 @@
   <p:clrMapOvr>
     <a:masterClrMapping/>
   </p:clrMapOvr>
+  <p:timing>
+    <p:tnLst>
+      <p:par>
+        <p:cTn id="1" dur="indefinite" restart="never" nodeType="tmRoot"/>
+      </p:par>
+    </p:tnLst>
+  </p:timing>
 </p:sld>
 </file>
 
@@ -58863,6 +59087,13 @@
   <p:clrMapOvr>
     <a:masterClrMapping/>
   </p:clrMapOvr>
+  <p:timing>
+    <p:tnLst>
+      <p:par>
+        <p:cTn id="1" dur="indefinite" restart="never" nodeType="tmRoot"/>
+      </p:par>
+    </p:tnLst>
+  </p:timing>
 </p:sld>
 </file>
 
@@ -59169,6 +59400,13 @@
   <p:clrMapOvr>
     <a:masterClrMapping/>
   </p:clrMapOvr>
+  <p:timing>
+    <p:tnLst>
+      <p:par>
+        <p:cTn id="1" dur="indefinite" restart="never" nodeType="tmRoot"/>
+      </p:par>
+    </p:tnLst>
+  </p:timing>
 </p:sld>
 </file>
 
@@ -59463,6 +59701,13 @@
   <p:clrMapOvr>
     <a:masterClrMapping/>
   </p:clrMapOvr>
+  <p:timing>
+    <p:tnLst>
+      <p:par>
+        <p:cTn id="1" dur="indefinite" restart="never" nodeType="tmRoot"/>
+      </p:par>
+    </p:tnLst>
+  </p:timing>
 </p:sld>
 </file>
 
@@ -59741,6 +59986,13 @@
   <p:clrMapOvr>
     <a:masterClrMapping/>
   </p:clrMapOvr>
+  <p:timing>
+    <p:tnLst>
+      <p:par>
+        <p:cTn id="1" dur="indefinite" restart="never" nodeType="tmRoot"/>
+      </p:par>
+    </p:tnLst>
+  </p:timing>
 </p:sld>
 </file>
 
@@ -60035,6 +60287,13 @@
   <p:clrMapOvr>
     <a:masterClrMapping/>
   </p:clrMapOvr>
+  <p:timing>
+    <p:tnLst>
+      <p:par>
+        <p:cTn id="1" dur="indefinite" restart="never" nodeType="tmRoot"/>
+      </p:par>
+    </p:tnLst>
+  </p:timing>
 </p:sld>
 </file>
 
@@ -60341,6 +60600,13 @@
   <p:clrMapOvr>
     <a:masterClrMapping/>
   </p:clrMapOvr>
+  <p:timing>
+    <p:tnLst>
+      <p:par>
+        <p:cTn id="1" dur="indefinite" restart="never" nodeType="tmRoot"/>
+      </p:par>
+    </p:tnLst>
+  </p:timing>
 </p:sld>
 </file>
 
@@ -60669,6 +60935,13 @@
   <p:clrMapOvr>
     <a:masterClrMapping/>
   </p:clrMapOvr>
+  <p:timing>
+    <p:tnLst>
+      <p:par>
+        <p:cTn id="1" dur="indefinite" restart="never" nodeType="tmRoot"/>
+      </p:par>
+    </p:tnLst>
+  </p:timing>
 </p:sld>
 </file>
 
@@ -60963,6 +61236,13 @@
   <p:clrMapOvr>
     <a:masterClrMapping/>
   </p:clrMapOvr>
+  <p:timing>
+    <p:tnLst>
+      <p:par>
+        <p:cTn id="1" dur="indefinite" restart="never" nodeType="tmRoot"/>
+      </p:par>
+    </p:tnLst>
+  </p:timing>
 </p:sld>
 </file>
 
@@ -61269,6 +61549,13 @@
   <p:clrMapOvr>
     <a:masterClrMapping/>
   </p:clrMapOvr>
+  <p:timing>
+    <p:tnLst>
+      <p:par>
+        <p:cTn id="1" dur="indefinite" restart="never" nodeType="tmRoot"/>
+      </p:par>
+    </p:tnLst>
+  </p:timing>
 </p:sld>
 </file>
 
@@ -61582,6 +61869,13 @@
   <p:clrMapOvr>
     <a:masterClrMapping/>
   </p:clrMapOvr>
+  <p:timing>
+    <p:tnLst>
+      <p:par>
+        <p:cTn id="1" dur="indefinite" restart="never" nodeType="tmRoot"/>
+      </p:par>
+    </p:tnLst>
+  </p:timing>
 </p:sld>
 </file>
 
@@ -61904,6 +62198,13 @@
   <p:clrMapOvr>
     <a:masterClrMapping/>
   </p:clrMapOvr>
+  <p:timing>
+    <p:tnLst>
+      <p:par>
+        <p:cTn id="1" dur="indefinite" restart="never" nodeType="tmRoot"/>
+      </p:par>
+    </p:tnLst>
+  </p:timing>
 </p:sld>
 </file>
 
@@ -62673,6 +62974,13 @@
   <p:clrMapOvr>
     <a:masterClrMapping/>
   </p:clrMapOvr>
+  <p:timing>
+    <p:tnLst>
+      <p:par>
+        <p:cTn id="1" dur="indefinite" restart="never" nodeType="tmRoot"/>
+      </p:par>
+    </p:tnLst>
+  </p:timing>
 </p:sld>
 </file>
 
@@ -63007,6 +63315,13 @@
   <p:clrMapOvr>
     <a:masterClrMapping/>
   </p:clrMapOvr>
+  <p:timing>
+    <p:tnLst>
+      <p:par>
+        <p:cTn id="1" dur="indefinite" restart="never" nodeType="tmRoot"/>
+      </p:par>
+    </p:tnLst>
+  </p:timing>
 </p:sld>
 </file>
 
@@ -63211,6 +63526,13 @@
   <p:clrMapOvr>
     <a:masterClrMapping/>
   </p:clrMapOvr>
+  <p:timing>
+    <p:tnLst>
+      <p:par>
+        <p:cTn id="1" dur="indefinite" restart="never" nodeType="tmRoot"/>
+      </p:par>
+    </p:tnLst>
+  </p:timing>
 </p:sld>
 </file>
 
@@ -63489,6 +63811,13 @@
   <p:clrMapOvr>
     <a:masterClrMapping/>
   </p:clrMapOvr>
+  <p:timing>
+    <p:tnLst>
+      <p:par>
+        <p:cTn id="1" dur="indefinite" restart="never" nodeType="tmRoot"/>
+      </p:par>
+    </p:tnLst>
+  </p:timing>
 </p:sld>
 </file>
 
@@ -63811,6 +64140,13 @@
   <p:clrMapOvr>
     <a:masterClrMapping/>
   </p:clrMapOvr>
+  <p:timing>
+    <p:tnLst>
+      <p:par>
+        <p:cTn id="1" dur="indefinite" restart="never" nodeType="tmRoot"/>
+      </p:par>
+    </p:tnLst>
+  </p:timing>
 </p:sld>
 </file>
 
@@ -64105,6 +64441,13 @@
   <p:clrMapOvr>
     <a:masterClrMapping/>
   </p:clrMapOvr>
+  <p:timing>
+    <p:tnLst>
+      <p:par>
+        <p:cTn id="1" dur="indefinite" restart="never" nodeType="tmRoot"/>
+      </p:par>
+    </p:tnLst>
+  </p:timing>
 </p:sld>
 </file>
 
